--- a/FSAD-End Semester-PPT_Template-Milestone_Project.pptx
+++ b/FSAD-End Semester-PPT_Template-Milestone_Project.pptx
@@ -5347,7 +5347,7 @@
         </p:nvSpPr>
         <p:spPr>
           <a:xfrm>
-            <a:off x="2820413" y="2769634"/>
+            <a:off x="2673531" y="2571672"/>
             <a:ext cx="13930143" cy="3785652"/>
           </a:xfrm>
           <a:prstGeom prst="rect">
@@ -19856,8 +19856,8 @@
         </p:nvSpPr>
         <p:spPr>
           <a:xfrm>
-            <a:off x="2133600" y="1804628"/>
-            <a:ext cx="13619125" cy="2862322"/>
+            <a:off x="1905000" y="1849354"/>
+            <a:ext cx="14706600" cy="6555641"/>
           </a:xfrm>
           <a:prstGeom prst="rect">
             <a:avLst/>
@@ -19872,40 +19872,148 @@
           <a:p>
             <a:pPr marL="457200" indent="-457200">
               <a:buFontTx/>
-              <a:buChar char="-"/>
+              <a:buChar char="•"/>
             </a:pPr>
             <a:r>
               <a:rPr lang="en-US" sz="3000" dirty="0">
                 <a:latin typeface="Times New Roman" panose="02020603050405020304" pitchFamily="18" charset="0"/>
                 <a:cs typeface="Times New Roman" panose="02020603050405020304" pitchFamily="18" charset="0"/>
               </a:rPr>
-              <a:t>Design and develop a React JS-based single-page ticket booking application for the TechNova 2025 internal departmental technical event.</a:t>
+              <a:t>Design and develop a React JS-based single-page ticket booking application for the </a:t>
+            </a:r>
+            <a:r>
+              <a:rPr lang="en-US" sz="3000" dirty="0" err="1">
+                <a:latin typeface="Times New Roman" panose="02020603050405020304" pitchFamily="18" charset="0"/>
+                <a:cs typeface="Times New Roman" panose="02020603050405020304" pitchFamily="18" charset="0"/>
+              </a:rPr>
+              <a:t>TechNova</a:t>
+            </a:r>
+            <a:r>
+              <a:rPr lang="en-US" sz="3000" dirty="0">
+                <a:latin typeface="Times New Roman" panose="02020603050405020304" pitchFamily="18" charset="0"/>
+                <a:cs typeface="Times New Roman" panose="02020603050405020304" pitchFamily="18" charset="0"/>
+              </a:rPr>
+              <a:t> 2025 internal departmental technical event.</a:t>
             </a:r>
           </a:p>
           <a:p>
             <a:pPr marL="457200" indent="-457200">
               <a:buFontTx/>
-              <a:buChar char="-"/>
+              <a:buChar char="•"/>
             </a:pPr>
             <a:r>
               <a:rPr lang="en-US" sz="3000" dirty="0">
                 <a:latin typeface="Times New Roman" panose="02020603050405020304" pitchFamily="18" charset="0"/>
                 <a:cs typeface="Times New Roman" panose="02020603050405020304" pitchFamily="18" charset="0"/>
               </a:rPr>
-              <a:t>Implement real-time form validation, Razorpay payment gateway integration, and QR code e-ticket generation to automate the full booking flow.</a:t>
+              <a:t>Implement an Event Details Module displaying event name, department, date, time, venue, price, and live ticket availability.</a:t>
             </a:r>
           </a:p>
           <a:p>
             <a:pPr marL="457200" indent="-457200">
               <a:buFontTx/>
-              <a:buChar char="-"/>
+              <a:buChar char="•"/>
             </a:pPr>
             <a:r>
               <a:rPr lang="en-US" sz="3000" dirty="0">
                 <a:latin typeface="Times New Roman" panose="02020603050405020304" pitchFamily="18" charset="0"/>
                 <a:cs typeface="Times New Roman" panose="02020603050405020304" pitchFamily="18" charset="0"/>
               </a:rPr>
-              <a:t>Provide a role-based dashboard — Student Dashboard for booking history and Admin Dashboard for event management, analytics, and automated refunds.</a:t>
+              <a:t>Build a Ticket Booking Module with a validated form capturing name, email, department, and number of tickets.</a:t>
+            </a:r>
+          </a:p>
+          <a:p>
+            <a:pPr marL="457200" indent="-457200">
+              <a:buFontTx/>
+              <a:buChar char="•"/>
+            </a:pPr>
+            <a:r>
+              <a:rPr lang="en-US" sz="3000" dirty="0">
+                <a:latin typeface="Times New Roman" panose="02020603050405020304" pitchFamily="18" charset="0"/>
+                <a:cs typeface="Times New Roman" panose="02020603050405020304" pitchFamily="18" charset="0"/>
+              </a:rPr>
+              <a:t>Enforce all input validations: mandatory fields, email format check, positive ticket count, and overbooking prevention.</a:t>
+            </a:r>
+          </a:p>
+          <a:p>
+            <a:pPr marL="457200" indent="-457200">
+              <a:buFontTx/>
+              <a:buChar char="•"/>
+            </a:pPr>
+            <a:r>
+              <a:rPr lang="en-US" sz="3000" dirty="0">
+                <a:latin typeface="Times New Roman" panose="02020603050405020304" pitchFamily="18" charset="0"/>
+                <a:cs typeface="Times New Roman" panose="02020603050405020304" pitchFamily="18" charset="0"/>
+              </a:rPr>
+              <a:t>Dynamically update the available ticket count using </a:t>
+            </a:r>
+            <a:r>
+              <a:rPr lang="en-US" sz="3000" dirty="0" err="1">
+                <a:latin typeface="Times New Roman" panose="02020603050405020304" pitchFamily="18" charset="0"/>
+                <a:cs typeface="Times New Roman" panose="02020603050405020304" pitchFamily="18" charset="0"/>
+              </a:rPr>
+              <a:t>React's</a:t>
+            </a:r>
+            <a:r>
+              <a:rPr lang="en-US" sz="3000" dirty="0">
+                <a:latin typeface="Times New Roman" panose="02020603050405020304" pitchFamily="18" charset="0"/>
+                <a:cs typeface="Times New Roman" panose="02020603050405020304" pitchFamily="18" charset="0"/>
+              </a:rPr>
+              <a:t> </a:t>
+            </a:r>
+            <a:r>
+              <a:rPr lang="en-US" sz="3000" dirty="0" err="1">
+                <a:latin typeface="Times New Roman" panose="02020603050405020304" pitchFamily="18" charset="0"/>
+                <a:cs typeface="Times New Roman" panose="02020603050405020304" pitchFamily="18" charset="0"/>
+              </a:rPr>
+              <a:t>useState</a:t>
+            </a:r>
+            <a:r>
+              <a:rPr lang="en-US" sz="3000" dirty="0">
+                <a:latin typeface="Times New Roman" panose="02020603050405020304" pitchFamily="18" charset="0"/>
+                <a:cs typeface="Times New Roman" panose="02020603050405020304" pitchFamily="18" charset="0"/>
+              </a:rPr>
+              <a:t> hook after each successful booking without page reload.</a:t>
+            </a:r>
+          </a:p>
+          <a:p>
+            <a:pPr marL="457200" indent="-457200">
+              <a:buFontTx/>
+              <a:buChar char="•"/>
+            </a:pPr>
+            <a:r>
+              <a:rPr lang="en-US" sz="3000" dirty="0">
+                <a:latin typeface="Times New Roman" panose="02020603050405020304" pitchFamily="18" charset="0"/>
+                <a:cs typeface="Times New Roman" panose="02020603050405020304" pitchFamily="18" charset="0"/>
+              </a:rPr>
+              <a:t>Display a booking confirmation modal showing attendee name, event name, tickets booked, and total amount on successful submission.</a:t>
+            </a:r>
+          </a:p>
+          <a:p>
+            <a:pPr marL="457200" indent="-457200">
+              <a:buFontTx/>
+              <a:buChar char="•"/>
+            </a:pPr>
+            <a:r>
+              <a:rPr lang="en-US" sz="3000" dirty="0">
+                <a:latin typeface="Times New Roman" panose="02020603050405020304" pitchFamily="18" charset="0"/>
+                <a:cs typeface="Times New Roman" panose="02020603050405020304" pitchFamily="18" charset="0"/>
+              </a:rPr>
+              <a:t>Demonstrate core React concepts: functional components, JSX, </a:t>
+            </a:r>
+            <a:r>
+              <a:rPr lang="en-US" sz="3000" dirty="0" err="1">
+                <a:latin typeface="Times New Roman" panose="02020603050405020304" pitchFamily="18" charset="0"/>
+                <a:cs typeface="Times New Roman" panose="02020603050405020304" pitchFamily="18" charset="0"/>
+              </a:rPr>
+              <a:t>useState</a:t>
+            </a:r>
+            <a:r>
+              <a:rPr lang="en-US" sz="3000" dirty="0">
+                <a:latin typeface="Times New Roman" panose="02020603050405020304" pitchFamily="18" charset="0"/>
+                <a:cs typeface="Times New Roman" panose="02020603050405020304" pitchFamily="18" charset="0"/>
+              </a:rPr>
+              <a:t>, event handling, and conditional rendering in a real project.</a:t>
             </a:r>
           </a:p>
         </p:txBody>
@@ -22619,8 +22727,8 @@
         </p:nvSpPr>
         <p:spPr>
           <a:xfrm>
-            <a:off x="2209800" y="2150000"/>
-            <a:ext cx="15082325" cy="8279190"/>
+            <a:off x="2322536" y="1939521"/>
+            <a:ext cx="7431064" cy="6986528"/>
           </a:xfrm>
           <a:prstGeom prst="rect">
             <a:avLst/>
@@ -22633,87 +22741,191 @@
           </a:bodyPr>
           <a:lstStyle/>
           <a:p>
-            <a:pPr marL="457200" indent="-457200">
+            <a:pPr algn="just"/>
+            <a:r>
+              <a:rPr lang="en-US" sz="2800" b="1" dirty="0">
+                <a:latin typeface="Times New Roman" panose="02020603050405020304" pitchFamily="18" charset="0"/>
+                <a:cs typeface="Times New Roman" panose="02020603050405020304" pitchFamily="18" charset="0"/>
+              </a:rPr>
+              <a:t>Input:</a:t>
+            </a:r>
+          </a:p>
+          <a:p>
+            <a:pPr marL="457200" indent="-457200" algn="just">
               <a:buFontTx/>
               <a:buChar char="-"/>
             </a:pPr>
             <a:r>
-              <a:rPr lang="en-US" sz="2800" b="1" dirty="0"/>
-              <a:t>Input:</a:t>
+              <a:rPr lang="en-US" sz="2800" dirty="0">
+                <a:latin typeface="Times New Roman" panose="02020603050405020304" pitchFamily="18" charset="0"/>
+                <a:cs typeface="Times New Roman" panose="02020603050405020304" pitchFamily="18" charset="0"/>
+              </a:rPr>
+              <a:t>User login credentials, event selection, ticket quantity, competition choices, and </a:t>
             </a:r>
-          </a:p>
-          <a:p>
-            <a:pPr marL="457200" indent="-457200">
+            <a:r>
+              <a:rPr lang="en-US" sz="2800" dirty="0" err="1">
+                <a:latin typeface="Times New Roman" panose="02020603050405020304" pitchFamily="18" charset="0"/>
+                <a:cs typeface="Times New Roman" panose="02020603050405020304" pitchFamily="18" charset="0"/>
+              </a:rPr>
+              <a:t>Razorpay</a:t>
+            </a:r>
+            <a:r>
+              <a:rPr lang="en-US" sz="2800" dirty="0">
+                <a:latin typeface="Times New Roman" panose="02020603050405020304" pitchFamily="18" charset="0"/>
+                <a:cs typeface="Times New Roman" panose="02020603050405020304" pitchFamily="18" charset="0"/>
+              </a:rPr>
+              <a:t> payment details.</a:t>
+            </a:r>
+          </a:p>
+          <a:p>
+            <a:pPr algn="just"/>
+            <a:r>
+              <a:rPr lang="en-US" sz="2800" b="1" dirty="0">
+                <a:latin typeface="Times New Roman" panose="02020603050405020304" pitchFamily="18" charset="0"/>
+                <a:cs typeface="Times New Roman" panose="02020603050405020304" pitchFamily="18" charset="0"/>
+              </a:rPr>
+              <a:t>Processing:</a:t>
+            </a:r>
+          </a:p>
+          <a:p>
+            <a:pPr marL="457200" indent="-457200" algn="just">
               <a:buFontTx/>
               <a:buChar char="-"/>
             </a:pPr>
             <a:r>
-              <a:rPr lang="en-US" sz="2800" dirty="0"/>
-              <a:t>User login credentials, event selection, ticket quantity, competition choices, and Razorpay payment details.</a:t>
+              <a:rPr lang="en-US" sz="2800" dirty="0">
+                <a:latin typeface="Times New Roman" panose="02020603050405020304" pitchFamily="18" charset="0"/>
+                <a:cs typeface="Times New Roman" panose="02020603050405020304" pitchFamily="18" charset="0"/>
+              </a:rPr>
+              <a:t>React JS functional components with </a:t>
             </a:r>
-          </a:p>
-          <a:p>
-            <a:pPr marL="457200" indent="-457200">
+            <a:r>
+              <a:rPr lang="en-US" sz="2800" dirty="0" err="1">
+                <a:latin typeface="Times New Roman" panose="02020603050405020304" pitchFamily="18" charset="0"/>
+                <a:cs typeface="Times New Roman" panose="02020603050405020304" pitchFamily="18" charset="0"/>
+              </a:rPr>
+              <a:t>useState</a:t>
+            </a:r>
+            <a:r>
+              <a:rPr lang="en-US" sz="2800" dirty="0">
+                <a:latin typeface="Times New Roman" panose="02020603050405020304" pitchFamily="18" charset="0"/>
+                <a:cs typeface="Times New Roman" panose="02020603050405020304" pitchFamily="18" charset="0"/>
+              </a:rPr>
+              <a:t>/</a:t>
+            </a:r>
+            <a:r>
+              <a:rPr lang="en-US" sz="2800" dirty="0" err="1">
+                <a:latin typeface="Times New Roman" panose="02020603050405020304" pitchFamily="18" charset="0"/>
+                <a:cs typeface="Times New Roman" panose="02020603050405020304" pitchFamily="18" charset="0"/>
+              </a:rPr>
+              <a:t>useContext</a:t>
+            </a:r>
+            <a:r>
+              <a:rPr lang="en-US" sz="2800" dirty="0">
+                <a:latin typeface="Times New Roman" panose="02020603050405020304" pitchFamily="18" charset="0"/>
+                <a:cs typeface="Times New Roman" panose="02020603050405020304" pitchFamily="18" charset="0"/>
+              </a:rPr>
+              <a:t> hooks handle validation, state updates, and </a:t>
+            </a:r>
+            <a:r>
+              <a:rPr lang="en-US" sz="2800" dirty="0" err="1">
+                <a:latin typeface="Times New Roman" panose="02020603050405020304" pitchFamily="18" charset="0"/>
+                <a:cs typeface="Times New Roman" panose="02020603050405020304" pitchFamily="18" charset="0"/>
+              </a:rPr>
+              <a:t>Razorpay</a:t>
+            </a:r>
+            <a:r>
+              <a:rPr lang="en-US" sz="2800" dirty="0">
+                <a:latin typeface="Times New Roman" panose="02020603050405020304" pitchFamily="18" charset="0"/>
+                <a:cs typeface="Times New Roman" panose="02020603050405020304" pitchFamily="18" charset="0"/>
+              </a:rPr>
+              <a:t> checkout flow.</a:t>
+            </a:r>
+          </a:p>
+          <a:p>
+            <a:pPr algn="just"/>
+            <a:r>
+              <a:rPr lang="en-US" sz="2800" b="1" dirty="0">
+                <a:latin typeface="Times New Roman" panose="02020603050405020304" pitchFamily="18" charset="0"/>
+                <a:cs typeface="Times New Roman" panose="02020603050405020304" pitchFamily="18" charset="0"/>
+              </a:rPr>
+              <a:t>Storage (eventData.js):</a:t>
+            </a:r>
+          </a:p>
+          <a:p>
+            <a:pPr marL="457200" indent="-457200" algn="just">
               <a:buFontTx/>
               <a:buChar char="-"/>
             </a:pPr>
             <a:r>
-              <a:rPr lang="en-US" sz="2800" b="1" dirty="0"/>
-              <a:t>Processing:</a:t>
+              <a:rPr lang="en-US" sz="2800" dirty="0">
+                <a:latin typeface="Times New Roman" panose="02020603050405020304" pitchFamily="18" charset="0"/>
+                <a:cs typeface="Times New Roman" panose="02020603050405020304" pitchFamily="18" charset="0"/>
+              </a:rPr>
+              <a:t>In-memory mock database stores events, competitions, user bookings, and ticket availability — updated in real time.</a:t>
             </a:r>
           </a:p>
           <a:p>
-            <a:pPr marL="457200" indent="-457200">
+            <a:pPr algn="just"/>
+            <a:r>
+              <a:rPr lang="en-US" sz="2800" b="1" dirty="0">
+                <a:latin typeface="Times New Roman" panose="02020603050405020304" pitchFamily="18" charset="0"/>
+                <a:cs typeface="Times New Roman" panose="02020603050405020304" pitchFamily="18" charset="0"/>
+              </a:rPr>
+              <a:t>Output:</a:t>
+            </a:r>
+          </a:p>
+          <a:p>
+            <a:pPr marL="457200" indent="-457200" algn="just">
               <a:buFontTx/>
               <a:buChar char="-"/>
             </a:pPr>
             <a:r>
-              <a:rPr lang="en-US" sz="2800" dirty="0"/>
-              <a:t>React JS functional components with useState/useContext hooks handle validation, state updates, and Razorpay checkout flow.</a:t>
-            </a:r>
-          </a:p>
-          <a:p>
-            <a:pPr marL="457200" indent="-457200">
-              <a:buFontTx/>
-              <a:buChar char="-"/>
-            </a:pPr>
-            <a:r>
-              <a:rPr lang="en-US" sz="2800" b="1" dirty="0"/>
-              <a:t>Storage (eventData.js):</a:t>
-            </a:r>
-          </a:p>
-          <a:p>
-            <a:pPr marL="457200" indent="-457200">
-              <a:buFontTx/>
-              <a:buChar char="-"/>
-            </a:pPr>
-            <a:r>
-              <a:rPr lang="en-US" sz="2800" dirty="0"/>
-              <a:t>In-memory mock database stores events, competitions, user bookings, and ticket availability — updated in real time.</a:t>
-            </a:r>
-          </a:p>
-          <a:p>
-            <a:pPr marL="457200" indent="-457200">
-              <a:buFontTx/>
-              <a:buChar char="-"/>
-            </a:pPr>
-            <a:r>
-              <a:rPr lang="en-US" sz="2800" b="1" dirty="0"/>
-              <a:t>Output:</a:t>
-            </a:r>
-          </a:p>
-          <a:p>
-            <a:pPr marL="457200" indent="-457200">
-              <a:buFontTx/>
-              <a:buChar char="-"/>
-            </a:pPr>
-            <a:r>
-              <a:rPr lang="en-US" sz="2800" dirty="0"/>
+              <a:rPr lang="en-US" sz="2800" dirty="0">
+                <a:latin typeface="Times New Roman" panose="02020603050405020304" pitchFamily="18" charset="0"/>
+                <a:cs typeface="Times New Roman" panose="02020603050405020304" pitchFamily="18" charset="0"/>
+              </a:rPr>
               <a:t>Booking confirmation with QR code e-ticket; Admin dashboard with live revenue charts, booking table, and event controls.</a:t>
             </a:r>
           </a:p>
         </p:txBody>
       </p:sp>
+      <p:pic>
+        <p:nvPicPr>
+          <p:cNvPr id="3" name="Picture 2">
+            <a:extLst>
+              <a:ext uri="{FF2B5EF4-FFF2-40B4-BE49-F238E27FC236}">
+                <a16:creationId xmlns:a16="http://schemas.microsoft.com/office/drawing/2014/main" id="{B4BA7FDE-06A6-1CD2-0A98-D43F63402CE5}"/>
+              </a:ext>
+            </a:extLst>
+          </p:cNvPr>
+          <p:cNvPicPr>
+            <a:picLocks noChangeAspect="1"/>
+          </p:cNvPicPr>
+          <p:nvPr/>
+        </p:nvPicPr>
+        <p:blipFill>
+          <a:blip r:embed="rId2" cstate="print">
+            <a:extLst>
+              <a:ext uri="{28A0092B-C50C-407E-A947-70E740481C1C}">
+                <a14:useLocalDpi xmlns:a14="http://schemas.microsoft.com/office/drawing/2010/main" val="0"/>
+              </a:ext>
+            </a:extLst>
+          </a:blip>
+          <a:stretch>
+            <a:fillRect/>
+          </a:stretch>
+        </p:blipFill>
+        <p:spPr>
+          <a:xfrm>
+            <a:off x="10424392" y="2891643"/>
+            <a:ext cx="7154251" cy="4873356"/>
+          </a:xfrm>
+          <a:prstGeom prst="rect">
+            <a:avLst/>
+          </a:prstGeom>
+        </p:spPr>
+      </p:pic>
     </p:spTree>
   </p:cSld>
   <p:clrMapOvr>
@@ -23893,8 +24105,8 @@
         </p:nvSpPr>
         <p:spPr>
           <a:xfrm>
-            <a:off x="2209800" y="2150000"/>
-            <a:ext cx="15082325" cy="4832092"/>
+            <a:off x="2162877" y="1403730"/>
+            <a:ext cx="7666923" cy="7694414"/>
           </a:xfrm>
           <a:prstGeom prst="rect">
             <a:avLst/>
@@ -23907,102 +24119,117 @@
           </a:bodyPr>
           <a:lstStyle/>
           <a:p>
-            <a:pPr marL="457200" indent="-457200">
+            <a:pPr algn="just"/>
+            <a:r>
+              <a:rPr lang="en-US" sz="2600" b="1" dirty="0">
+                <a:latin typeface="Times New Roman" panose="02020603050405020304" pitchFamily="18" charset="0"/>
+                <a:cs typeface="Times New Roman" panose="02020603050405020304" pitchFamily="18" charset="0"/>
+              </a:rPr>
+              <a:t>Step 1 — Authentication:</a:t>
+            </a:r>
+          </a:p>
+          <a:p>
+            <a:pPr marL="457200" indent="-457200" algn="just">
               <a:buFontTx/>
               <a:buChar char="-"/>
             </a:pPr>
             <a:r>
-              <a:rPr lang="en-US" sz="2800" b="1" dirty="0"/>
-              <a:t>Step 1 — Authentication:</a:t>
+              <a:rPr lang="en-US" sz="2600" dirty="0">
+                <a:latin typeface="Times New Roman" panose="02020603050405020304" pitchFamily="18" charset="0"/>
+                <a:cs typeface="Times New Roman" panose="02020603050405020304" pitchFamily="18" charset="0"/>
+              </a:rPr>
+              <a:t>User registers or logs in. AuthContext identifies role (Student / Admin) and routes to the correct dashboard.</a:t>
             </a:r>
           </a:p>
           <a:p>
-            <a:pPr marL="457200" indent="-457200">
+            <a:pPr algn="just"/>
+            <a:r>
+              <a:rPr lang="en-US" sz="2600" b="1" dirty="0">
+                <a:latin typeface="Times New Roman" panose="02020603050405020304" pitchFamily="18" charset="0"/>
+                <a:cs typeface="Times New Roman" panose="02020603050405020304" pitchFamily="18" charset="0"/>
+              </a:rPr>
+              <a:t>Step 2 — Event Browsing:</a:t>
+            </a:r>
+          </a:p>
+          <a:p>
+            <a:pPr marL="457200" indent="-457200" algn="just">
               <a:buFontTx/>
               <a:buChar char="-"/>
             </a:pPr>
             <a:r>
-              <a:rPr lang="en-US" sz="2800" dirty="0"/>
-              <a:t>User registers or logs in. AuthContext identifies role (Student / Admin) and routes to the correct dashboard.</a:t>
+              <a:rPr lang="en-US" sz="2600" dirty="0">
+                <a:latin typeface="Times New Roman" panose="02020603050405020304" pitchFamily="18" charset="0"/>
+                <a:cs typeface="Times New Roman" panose="02020603050405020304" pitchFamily="18" charset="0"/>
+              </a:rPr>
+              <a:t>EventPage fetches event data from eventData.js and displays live seat availability with category filters.</a:t>
             </a:r>
           </a:p>
           <a:p>
-            <a:pPr marL="457200" indent="-457200">
+            <a:pPr algn="just"/>
+            <a:r>
+              <a:rPr lang="en-US" sz="2600" b="1" dirty="0">
+                <a:latin typeface="Times New Roman" panose="02020603050405020304" pitchFamily="18" charset="0"/>
+                <a:cs typeface="Times New Roman" panose="02020603050405020304" pitchFamily="18" charset="0"/>
+              </a:rPr>
+              <a:t>Step 3 — Booking Form:</a:t>
+            </a:r>
+          </a:p>
+          <a:p>
+            <a:pPr marL="457200" indent="-457200" algn="just">
               <a:buFontTx/>
               <a:buChar char="-"/>
             </a:pPr>
             <a:r>
-              <a:rPr lang="en-US" sz="2800" b="1" dirty="0"/>
-              <a:t>Step 2 — Event Browsing:</a:t>
+              <a:rPr lang="en-US" sz="2600" dirty="0">
+                <a:latin typeface="Times New Roman" panose="02020603050405020304" pitchFamily="18" charset="0"/>
+                <a:cs typeface="Times New Roman" panose="02020603050405020304" pitchFamily="18" charset="0"/>
+              </a:rPr>
+              <a:t>BookingPage collects name, email, department, ticket count, and up to 3 competition choices. validate() checks all fields.</a:t>
             </a:r>
           </a:p>
           <a:p>
-            <a:pPr marL="457200" indent="-457200">
+            <a:pPr algn="just"/>
+            <a:r>
+              <a:rPr lang="en-US" sz="2600" b="1" dirty="0">
+                <a:latin typeface="Times New Roman" panose="02020603050405020304" pitchFamily="18" charset="0"/>
+                <a:cs typeface="Times New Roman" panose="02020603050405020304" pitchFamily="18" charset="0"/>
+              </a:rPr>
+              <a:t>Step 4 — Payment:</a:t>
+            </a:r>
+          </a:p>
+          <a:p>
+            <a:pPr marL="457200" indent="-457200" algn="just">
               <a:buFontTx/>
               <a:buChar char="-"/>
             </a:pPr>
             <a:r>
-              <a:rPr lang="en-US" sz="2800" dirty="0"/>
-              <a:t>EventPage fetches event data from eventData.js and displays live seat availability with category filters.</a:t>
+              <a:rPr lang="en-US" sz="2600" dirty="0">
+                <a:latin typeface="Times New Roman" panose="02020603050405020304" pitchFamily="18" charset="0"/>
+                <a:cs typeface="Times New Roman" panose="02020603050405020304" pitchFamily="18" charset="0"/>
+              </a:rPr>
+              <a:t>On valid submission, razorpayService.js opens the Razorpay checkout. Success callback stores booking and decrements seat count.</a:t>
             </a:r>
           </a:p>
           <a:p>
-            <a:pPr marL="457200" indent="-457200">
+            <a:pPr algn="just"/>
+            <a:r>
+              <a:rPr lang="en-US" sz="2600" b="1" dirty="0">
+                <a:latin typeface="Times New Roman" panose="02020603050405020304" pitchFamily="18" charset="0"/>
+                <a:cs typeface="Times New Roman" panose="02020603050405020304" pitchFamily="18" charset="0"/>
+              </a:rPr>
+              <a:t>Step 5 — Confirmation:</a:t>
+            </a:r>
+          </a:p>
+          <a:p>
+            <a:pPr marL="457200" indent="-457200" algn="just">
               <a:buFontTx/>
               <a:buChar char="-"/>
             </a:pPr>
             <a:r>
-              <a:rPr lang="en-US" sz="2800" b="1" dirty="0"/>
-              <a:t>Step 3 — Booking Form:</a:t>
-            </a:r>
-          </a:p>
-          <a:p>
-            <a:pPr marL="457200" indent="-457200">
-              <a:buFontTx/>
-              <a:buChar char="-"/>
-            </a:pPr>
-            <a:r>
-              <a:rPr lang="en-US" sz="2800" dirty="0"/>
-              <a:t>BookingPage collects name, email, department, ticket count, and up to 3 competition choices. validate() checks all fields.</a:t>
-            </a:r>
-          </a:p>
-          <a:p>
-            <a:pPr marL="457200" indent="-457200">
-              <a:buFontTx/>
-              <a:buChar char="-"/>
-            </a:pPr>
-            <a:r>
-              <a:rPr lang="en-US" sz="2800" b="1" dirty="0"/>
-              <a:t>Step 4 — Payment:</a:t>
-            </a:r>
-          </a:p>
-          <a:p>
-            <a:pPr marL="457200" indent="-457200">
-              <a:buFontTx/>
-              <a:buChar char="-"/>
-            </a:pPr>
-            <a:r>
-              <a:rPr lang="en-US" sz="2800" dirty="0"/>
-              <a:t>On valid submission, razorpayService.js opens the Razorpay checkout. Success callback stores booking and decrements seat count.</a:t>
-            </a:r>
-          </a:p>
-          <a:p>
-            <a:pPr marL="457200" indent="-457200">
-              <a:buFontTx/>
-              <a:buChar char="-"/>
-            </a:pPr>
-            <a:r>
-              <a:rPr lang="en-US" sz="2800" b="1" dirty="0"/>
-              <a:t>Step 5 — Confirmation:</a:t>
-            </a:r>
-          </a:p>
-          <a:p>
-            <a:pPr marL="457200" indent="-457200">
-              <a:buFontTx/>
-              <a:buChar char="-"/>
-            </a:pPr>
-            <a:r>
-              <a:rPr lang="en-US" sz="2800" dirty="0"/>
+              <a:rPr lang="en-US" sz="2600" dirty="0">
+                <a:latin typeface="Times New Roman" panose="02020603050405020304" pitchFamily="18" charset="0"/>
+                <a:cs typeface="Times New Roman" panose="02020603050405020304" pitchFamily="18" charset="0"/>
+              </a:rPr>
               <a:t>BookingConfirmation renders a summary with a QR code e-ticket that the user can download as a digital pass.</a:t>
             </a:r>
           </a:p>
@@ -24133,6 +24360,42 @@
           </p:txBody>
         </p:sp>
       </p:grpSp>
+      <p:pic>
+        <p:nvPicPr>
+          <p:cNvPr id="6" name="Picture 5">
+            <a:extLst>
+              <a:ext uri="{FF2B5EF4-FFF2-40B4-BE49-F238E27FC236}">
+                <a16:creationId xmlns:a16="http://schemas.microsoft.com/office/drawing/2014/main" id="{801383C5-7ED7-A973-EEE9-E7A6096ABD12}"/>
+              </a:ext>
+            </a:extLst>
+          </p:cNvPr>
+          <p:cNvPicPr>
+            <a:picLocks noChangeAspect="1"/>
+          </p:cNvPicPr>
+          <p:nvPr/>
+        </p:nvPicPr>
+        <p:blipFill>
+          <a:blip r:embed="rId2">
+            <a:extLst>
+              <a:ext uri="{28A0092B-C50C-407E-A947-70E740481C1C}">
+                <a14:useLocalDpi xmlns:a14="http://schemas.microsoft.com/office/drawing/2010/main" val="0"/>
+              </a:ext>
+            </a:extLst>
+          </a:blip>
+          <a:stretch>
+            <a:fillRect/>
+          </a:stretch>
+        </p:blipFill>
+        <p:spPr>
+          <a:xfrm>
+            <a:off x="10506778" y="2525065"/>
+            <a:ext cx="7321251" cy="5261937"/>
+          </a:xfrm>
+          <a:prstGeom prst="rect">
+            <a:avLst/>
+          </a:prstGeom>
+        </p:spPr>
+      </p:pic>
     </p:spTree>
   </p:cSld>
   <p:clrMapOvr>
@@ -25313,7 +25576,7 @@
         <p:spPr>
           <a:xfrm>
             <a:off x="2209800" y="2150000"/>
-            <a:ext cx="15082325" cy="8279190"/>
+            <a:ext cx="15082325" cy="7417415"/>
           </a:xfrm>
           <a:prstGeom prst="rect">
             <a:avLst/>
@@ -25326,10 +25589,6 @@
           </a:bodyPr>
           <a:lstStyle/>
           <a:p>
-            <a:pPr marL="457200" indent="-457200">
-              <a:buFontTx/>
-              <a:buChar char="-"/>
-            </a:pPr>
             <a:r>
               <a:rPr lang="en-US" sz="2800" b="1" dirty="0"/>
               <a:t>Frontend:</a:t>
@@ -25346,10 +25605,6 @@
             </a:r>
           </a:p>
           <a:p>
-            <a:pPr marL="457200" indent="-457200">
-              <a:buFontTx/>
-              <a:buChar char="-"/>
-            </a:pPr>
             <a:r>
               <a:rPr lang="en-US" sz="2800" b="1" dirty="0"/>
               <a:t>Backend:</a:t>
@@ -25366,10 +25621,6 @@
             </a:r>
           </a:p>
           <a:p>
-            <a:pPr marL="457200" indent="-457200">
-              <a:buFontTx/>
-              <a:buChar char="-"/>
-            </a:pPr>
             <a:r>
               <a:rPr lang="en-US" sz="2800" b="1" dirty="0"/>
               <a:t>Database:</a:t>
@@ -25386,10 +25637,6 @@
             </a:r>
           </a:p>
           <a:p>
-            <a:pPr marL="457200" indent="-457200">
-              <a:buFontTx/>
-              <a:buChar char="-"/>
-            </a:pPr>
             <a:r>
               <a:rPr lang="en-US" sz="2800" b="1" dirty="0"/>
               <a:t>Third-Party API:</a:t>
@@ -25406,10 +25653,6 @@
             </a:r>
           </a:p>
           <a:p>
-            <a:pPr marL="457200" indent="-457200">
-              <a:buFontTx/>
-              <a:buChar char="-"/>
-            </a:pPr>
             <a:r>
               <a:rPr lang="en-US" sz="2800" b="1" dirty="0"/>
               <a:t>Tools:</a:t>
@@ -25426,10 +25669,6 @@
             </a:r>
           </a:p>
           <a:p>
-            <a:pPr marL="457200" indent="-457200">
-              <a:buFontTx/>
-              <a:buChar char="-"/>
-            </a:pPr>
             <a:r>
               <a:rPr lang="en-US" sz="2800" b="1" dirty="0"/>
               <a:t>Hardware / Software Requirements:</a:t>
@@ -26859,7 +27098,7 @@
         <p:spPr>
           <a:xfrm>
             <a:off x="2209800" y="2150000"/>
-            <a:ext cx="15082325" cy="8710077"/>
+            <a:ext cx="15082325" cy="6555641"/>
           </a:xfrm>
           <a:prstGeom prst="rect">
             <a:avLst/>
@@ -26872,10 +27111,6 @@
           </a:bodyPr>
           <a:lstStyle/>
           <a:p>
-            <a:pPr marL="457200" indent="-457200">
-              <a:buFontTx/>
-              <a:buChar char="-"/>
-            </a:pPr>
             <a:r>
               <a:rPr lang="en-US" sz="2800" b="1" dirty="0"/>
               <a:t>Module 1: User Authentication</a:t>
@@ -26892,10 +27127,6 @@
             </a:r>
           </a:p>
           <a:p>
-            <a:pPr marL="457200" indent="-457200">
-              <a:buFontTx/>
-              <a:buChar char="-"/>
-            </a:pPr>
             <a:r>
               <a:rPr lang="en-US" sz="2800" b="1" dirty="0"/>
               <a:t>Module 2: Event Details Module</a:t>
@@ -26912,10 +27143,6 @@
             </a:r>
           </a:p>
           <a:p>
-            <a:pPr marL="457200" indent="-457200">
-              <a:buFontTx/>
-              <a:buChar char="-"/>
-            </a:pPr>
             <a:r>
               <a:rPr lang="en-US" sz="2800" b="1" dirty="0"/>
               <a:t>Module 3: Ticket Booking Module</a:t>
@@ -26932,10 +27159,6 @@
             </a:r>
           </a:p>
           <a:p>
-            <a:pPr marL="457200" indent="-457200">
-              <a:buFontTx/>
-              <a:buChar char="-"/>
-            </a:pPr>
             <a:r>
               <a:rPr lang="en-US" sz="2800" b="1" dirty="0"/>
               <a:t>Module 4: Payment &amp; E-Ticket (Innovative Module)</a:t>
@@ -26952,10 +27175,6 @@
             </a:r>
           </a:p>
           <a:p>
-            <a:pPr marL="457200" indent="-457200">
-              <a:buFontTx/>
-              <a:buChar char="-"/>
-            </a:pPr>
             <a:r>
               <a:rPr lang="en-US" sz="2800" b="1" dirty="0"/>
               <a:t>Module 5: Admin Dashboard &amp; Analytics</a:t>
